--- a/instructor/modules/Module10-Production-Wrapup.pptx
+++ b/instructor/modules/Module10-Production-Wrapup.pptx
@@ -8832,7 +8832,7 @@
                 <a:ea typeface="Arial" pitchFamily="34" charset="-122"/>
                 <a:cs typeface="Arial" pitchFamily="34" charset="-120"/>
               </a:rPr>
-              <a:t>All starters from this week (real-time-chat, social-media in RR v7 + Next.js, Server Components dashboard)</a:t>
+              <a:t>All starters from this week, under lab-files/lab-01 through lab-08</a:t>
             </a:r>
             <a:endParaRPr lang="en-US" sz="1250" dirty="0"/>
           </a:p>
@@ -8853,7 +8853,7 @@
                 <a:ea typeface="Arial" pitchFamily="34" charset="-122"/>
                 <a:cs typeface="Arial" pitchFamily="34" charset="-120"/>
               </a:rPr>
-              <a:t>Solution branches for every lab</a:t>
+              <a:t>Reference solutions for every lab, under solutions/lab-NN-*</a:t>
             </a:r>
             <a:endParaRPr lang="en-US" sz="1250" dirty="0"/>
           </a:p>
@@ -8874,7 +8874,7 @@
                 <a:ea typeface="Arial" pitchFamily="34" charset="-122"/>
                 <a:cs typeface="Arial" pitchFamily="34" charset="-120"/>
               </a:rPr>
-              <a:t>Per-project READMEs and AGENTS.md examples</a:t>
+              <a:t>AGENTS.md / CLAUDE.md at the repo root — project context for AI assistants</a:t>
             </a:r>
             <a:endParaRPr lang="en-US" sz="1250" dirty="0"/>
           </a:p>
